--- a/public/fun/pack/pptx/weddingpro/결혼식프리미엄_12_러브스토리중심_누드모카.pptx
+++ b/public/fun/pack/pptx/weddingpro/결혼식프리미엄_12_러브스토리중심_누드모카.pptx
@@ -113,12 +113,12 @@
   <p:extLst>
     <p:ext uri="{521415D9-36F7-43E2-AB2F-B90AF26B5E84}">
       <p14:sectionLst xmlns:p14="http://schemas.microsoft.com/office/powerpoint/2010/main">
-        <p14:section name="시작" id="{CA0CD48F-325B-4A02-B13D-4E130C3E47F3}">
+        <p14:section name="시작" id="{BAECEA53-5BEC-42C5-BAD9-AEC1BB31FBE9}">
           <p14:sldIdLst>
             <p14:sldId id="256"/>
           </p14:sldIdLst>
         </p14:section>
-        <p14:section name="본문" id="{4705272F-E976-4D76-B669-10F60CAF4258}">
+        <p14:section name="본문" id="{2F1472E6-5137-4FC2-8935-294F920F6412}">
           <p14:sldIdLst>
             <p14:sldId id="257"/>
             <p14:sldId id="258"/>
@@ -127,7 +127,7 @@
             <p14:sldId id="261"/>
           </p14:sldIdLst>
         </p14:section>
-        <p14:section name="마무리" id="{BADABFC7-7EFD-477D-94E0-2FF507221B11}">
+        <p14:section name="마무리" id="{8D9AD571-6980-4062-9A14-0210A87A548E}">
           <p14:sldIdLst>
             <p14:sldId id="262"/>
           </p14:sldIdLst>
@@ -1543,7 +1543,7 @@
             </a:lvl1pPr>
           </a:lstStyle>
           <a:p>
-            <a:fld id="{FA4D84BA-605B-476C-8117-83055E4012EC}" type="slidenum">
+            <a:fld id="{8E8BAEEA-AD81-4778-A7DC-D44A0D889FA2}" type="slidenum">
               <a:rPr lang="en-US"/>
               <a:t>‹#›</a:t>
             </a:fld>
@@ -2219,7 +2219,7 @@
             </a:lvl1pPr>
           </a:lstStyle>
           <a:p>
-            <a:fld id="{FC31620A-4EC7-4C07-86EA-16DD436B88E9}" type="slidenum">
+            <a:fld id="{BFE30F0F-64C5-45B2-9861-D0F1346940D6}" type="slidenum">
               <a:rPr lang="en-US"/>
               <a:t>‹#›</a:t>
             </a:fld>
@@ -2897,7 +2897,7 @@
             </a:lvl1pPr>
           </a:lstStyle>
           <a:p>
-            <a:fld id="{98A00862-DE3A-407A-9EC8-369174CA038A}" type="slidenum">
+            <a:fld id="{CBD02D5E-60DF-4CB8-BD7C-A0D4133B09FE}" type="slidenum">
               <a:rPr lang="en-US"/>
               <a:t>‹#›</a:t>
             </a:fld>
@@ -3766,7 +3766,7 @@
           <a:p>
             <a:r>
               <a:rPr lang="ko-KR"/>
-              <a:t>0000. 00. 00 · 예식장 이름</a:t>
+              <a:t>날짜 입력 · 예식장 이름</a:t>
             </a:r>
           </a:p>
         </p:txBody>
@@ -3989,7 +3989,7 @@
           <a:bodyPr/>
           <a:lstStyle/>
           <a:p>
-            <a:fld id="{606A187B-F45C-47BF-A26D-295175A2D573}" type="slidenum">
+            <a:fld id="{E74D9C5E-85C8-490A-8FB1-A9A978CC90C2}" type="slidenum">
               <a:rPr lang="en-US"/>
               <a:t>‹#›</a:t>
             </a:fld>
@@ -4433,7 +4433,7 @@
           <a:bodyPr/>
           <a:lstStyle/>
           <a:p>
-            <a:fld id="{8BFDB33E-4FE3-458D-82DD-315A1F1B2DA9}" type="slidenum">
+            <a:fld id="{F63860AA-6D03-4638-9322-4A7B5535865E}" type="slidenum">
               <a:rPr lang="en-US"/>
               <a:t>‹#›</a:t>
             </a:fld>
@@ -5408,7 +5408,7 @@
           <a:bodyPr/>
           <a:lstStyle/>
           <a:p>
-            <a:fld id="{FF6916E2-B1F9-4B4F-95C6-E825DBB8E61B}" type="slidenum">
+            <a:fld id="{F5F3C157-B05A-4AC4-BC1B-66E42C162895}" type="slidenum">
               <a:rPr lang="en-US"/>
               <a:t>‹#›</a:t>
             </a:fld>
@@ -7018,7 +7018,7 @@
           <a:bodyPr/>
           <a:lstStyle/>
           <a:p>
-            <a:fld id="{50A7EFB4-397F-48D6-B7B3-B8AB1E6A4722}" type="slidenum">
+            <a:fld id="{94DE2248-BD14-4449-8194-4C07244B5CFD}" type="slidenum">
               <a:rPr lang="en-US"/>
               <a:t>‹#›</a:t>
             </a:fld>
@@ -7106,7 +7106,7 @@
           <a:bodyPr/>
           <a:lstStyle/>
           <a:p>
-            <a:fld id="{F1128898-72DB-4505-AEAE-D63FCD77FA7B}" type="slidenum">
+            <a:fld id="{E3B5810F-96AF-4D78-B5B7-C38E345F43B4}" type="slidenum">
               <a:rPr lang="en-US"/>
               <a:t>‹#›</a:t>
             </a:fld>
